--- a/docs/slides/UP-Drive-Slides.pptx
+++ b/docs/slides/UP-Drive-Slides.pptx
@@ -7803,7 +7803,7 @@
                 <a:ea typeface="Tahoma" pitchFamily="34" charset="-122"/>
                 <a:cs typeface="Tahoma" pitchFamily="34" charset="-120"/>
               </a:rPr>
-              <a:t>Trigger 3 · SQL Function 4 · Stored Procedure 3 · deploy แล้วบน Vercel</a:t>
+              <a:t>Trigger 3 · SQL Function 3 · Stored Procedure 3 · deploy แล้วบน Vercel</a:t>
             </a:r>
             <a:endParaRPr lang="en-US" sz="1200" dirty="0"/>
           </a:p>
